--- a/lectures/week-03/lecture-zh.pptx
+++ b/lectures/week-03/lecture-zh.pptx
@@ -27131,7 +27131,7 @@
                 </a:solidFill>
                 <a:latin typeface="Source Han Sans SC"/>
               </a:rPr>
-              <a:t>• 迟交：每次 −2 团队分，上限 −20</a:t>
+              <a:t>• 迟交：每次 −2 项目分，上限 −20</a:t>
             </a:r>
           </a:p>
           <a:p>
